--- a/Presentation1.pptx
+++ b/Presentation1.pptx
@@ -12,12 +12,6 @@
     <p:sldId id="260" r:id="rId6"/>
     <p:sldId id="261" r:id="rId7"/>
     <p:sldId id="262" r:id="rId8"/>
-    <p:sldId id="263" r:id="rId9"/>
-    <p:sldId id="264" r:id="rId10"/>
-    <p:sldId id="265" r:id="rId11"/>
-    <p:sldId id="266" r:id="rId12"/>
-    <p:sldId id="267" r:id="rId13"/>
-    <p:sldId id="268" r:id="rId14"/>
   </p:sldIdLst>
   <p:sldSz cx="12192000" cy="6858000"/>
   <p:notesSz cx="6858000" cy="9144000"/>
@@ -11399,7 +11393,7 @@
           <a:p>
             <a:fld id="{E7F16BE3-84DE-EF4E-BDFE-3E985270F5EE}" type="datetimeFigureOut">
               <a:rPr lang="en-US" smtClean="0"/>
-              <a:t>7/8/26</a:t>
+              <a:t>7/10/26</a:t>
             </a:fld>
             <a:endParaRPr lang="en-US"/>
           </a:p>
@@ -11599,7 +11593,7 @@
           <a:p>
             <a:fld id="{E7F16BE3-84DE-EF4E-BDFE-3E985270F5EE}" type="datetimeFigureOut">
               <a:rPr lang="en-US" smtClean="0"/>
-              <a:t>7/8/26</a:t>
+              <a:t>7/10/26</a:t>
             </a:fld>
             <a:endParaRPr lang="en-US"/>
           </a:p>
@@ -11809,7 +11803,7 @@
           <a:p>
             <a:fld id="{E7F16BE3-84DE-EF4E-BDFE-3E985270F5EE}" type="datetimeFigureOut">
               <a:rPr lang="en-US" smtClean="0"/>
-              <a:t>7/8/26</a:t>
+              <a:t>7/10/26</a:t>
             </a:fld>
             <a:endParaRPr lang="en-US"/>
           </a:p>
@@ -12009,7 +12003,7 @@
           <a:p>
             <a:fld id="{E7F16BE3-84DE-EF4E-BDFE-3E985270F5EE}" type="datetimeFigureOut">
               <a:rPr lang="en-US" smtClean="0"/>
-              <a:t>7/8/26</a:t>
+              <a:t>7/10/26</a:t>
             </a:fld>
             <a:endParaRPr lang="en-US"/>
           </a:p>
@@ -12285,7 +12279,7 @@
           <a:p>
             <a:fld id="{E7F16BE3-84DE-EF4E-BDFE-3E985270F5EE}" type="datetimeFigureOut">
               <a:rPr lang="en-US" smtClean="0"/>
-              <a:t>7/8/26</a:t>
+              <a:t>7/10/26</a:t>
             </a:fld>
             <a:endParaRPr lang="en-US"/>
           </a:p>
@@ -12553,7 +12547,7 @@
           <a:p>
             <a:fld id="{E7F16BE3-84DE-EF4E-BDFE-3E985270F5EE}" type="datetimeFigureOut">
               <a:rPr lang="en-US" smtClean="0"/>
-              <a:t>7/8/26</a:t>
+              <a:t>7/10/26</a:t>
             </a:fld>
             <a:endParaRPr lang="en-US"/>
           </a:p>
@@ -12968,7 +12962,7 @@
           <a:p>
             <a:fld id="{E7F16BE3-84DE-EF4E-BDFE-3E985270F5EE}" type="datetimeFigureOut">
               <a:rPr lang="en-US" smtClean="0"/>
-              <a:t>7/8/26</a:t>
+              <a:t>7/10/26</a:t>
             </a:fld>
             <a:endParaRPr lang="en-US"/>
           </a:p>
@@ -13110,7 +13104,7 @@
           <a:p>
             <a:fld id="{E7F16BE3-84DE-EF4E-BDFE-3E985270F5EE}" type="datetimeFigureOut">
               <a:rPr lang="en-US" smtClean="0"/>
-              <a:t>7/8/26</a:t>
+              <a:t>7/10/26</a:t>
             </a:fld>
             <a:endParaRPr lang="en-US"/>
           </a:p>
@@ -13223,7 +13217,7 @@
           <a:p>
             <a:fld id="{E7F16BE3-84DE-EF4E-BDFE-3E985270F5EE}" type="datetimeFigureOut">
               <a:rPr lang="en-US" smtClean="0"/>
-              <a:t>7/8/26</a:t>
+              <a:t>7/10/26</a:t>
             </a:fld>
             <a:endParaRPr lang="en-US"/>
           </a:p>
@@ -13536,7 +13530,7 @@
           <a:p>
             <a:fld id="{E7F16BE3-84DE-EF4E-BDFE-3E985270F5EE}" type="datetimeFigureOut">
               <a:rPr lang="en-US" smtClean="0"/>
-              <a:t>7/8/26</a:t>
+              <a:t>7/10/26</a:t>
             </a:fld>
             <a:endParaRPr lang="en-US"/>
           </a:p>
@@ -13825,7 +13819,7 @@
           <a:p>
             <a:fld id="{E7F16BE3-84DE-EF4E-BDFE-3E985270F5EE}" type="datetimeFigureOut">
               <a:rPr lang="en-US" smtClean="0"/>
-              <a:t>7/8/26</a:t>
+              <a:t>7/10/26</a:t>
             </a:fld>
             <a:endParaRPr lang="en-US"/>
           </a:p>
@@ -14068,7 +14062,7 @@
           <a:p>
             <a:fld id="{E7F16BE3-84DE-EF4E-BDFE-3E985270F5EE}" type="datetimeFigureOut">
               <a:rPr lang="en-US" smtClean="0"/>
-              <a:t>7/8/26</a:t>
+              <a:t>7/10/26</a:t>
             </a:fld>
             <a:endParaRPr lang="en-US"/>
           </a:p>
@@ -14825,342 +14819,6 @@
     <p:extLst>
       <p:ext uri="{BB962C8B-B14F-4D97-AF65-F5344CB8AC3E}">
         <p14:creationId xmlns:p14="http://schemas.microsoft.com/office/powerpoint/2010/main" val="3581537152"/>
-      </p:ext>
-    </p:extLst>
-  </p:cSld>
-  <p:clrMapOvr>
-    <a:masterClrMapping/>
-  </p:clrMapOvr>
-</p:sld>
-</file>
-
-<file path=ppt/slides/slide10.xml><?xml version="1.0" encoding="utf-8"?>
-<p:sld xmlns:a="http://schemas.openxmlformats.org/drawingml/2006/main" xmlns:r="http://schemas.openxmlformats.org/officeDocument/2006/relationships" xmlns:p="http://schemas.openxmlformats.org/presentationml/2006/main">
-  <p:cSld>
-    <p:spTree>
-      <p:nvGrpSpPr>
-        <p:cNvPr id="1" name=""/>
-        <p:cNvGrpSpPr/>
-        <p:nvPr/>
-      </p:nvGrpSpPr>
-      <p:grpSpPr>
-        <a:xfrm>
-          <a:off x="0" y="0"/>
-          <a:ext cx="0" cy="0"/>
-          <a:chOff x="0" y="0"/>
-          <a:chExt cx="0" cy="0"/>
-        </a:xfrm>
-      </p:grpSpPr>
-      <p:sp>
-        <p:nvSpPr>
-          <p:cNvPr id="2" name="Title 1">
-            <a:extLst>
-              <a:ext uri="{FF2B5EF4-FFF2-40B4-BE49-F238E27FC236}">
-                <a16:creationId xmlns:a16="http://schemas.microsoft.com/office/drawing/2014/main" id="{0ED9365C-90D1-ABED-0C54-38EFC83AF084}"/>
-              </a:ext>
-            </a:extLst>
-          </p:cNvPr>
-          <p:cNvSpPr>
-            <a:spLocks noGrp="1"/>
-          </p:cNvSpPr>
-          <p:nvPr>
-            <p:ph type="title"/>
-          </p:nvPr>
-        </p:nvSpPr>
-        <p:spPr/>
-        <p:txBody>
-          <a:bodyPr/>
-          <a:lstStyle/>
-          <a:p>
-            <a:r>
-              <a:rPr lang="en-IN" dirty="0"/>
-              <a:t>Distributed Computing Systems</a:t>
-            </a:r>
-            <a:endParaRPr lang="en-US" dirty="0"/>
-          </a:p>
-        </p:txBody>
-      </p:sp>
-      <p:sp>
-        <p:nvSpPr>
-          <p:cNvPr id="3" name="Content Placeholder 2">
-            <a:extLst>
-              <a:ext uri="{FF2B5EF4-FFF2-40B4-BE49-F238E27FC236}">
-                <a16:creationId xmlns:a16="http://schemas.microsoft.com/office/drawing/2014/main" id="{F1BF51AE-AB4D-B624-4F9B-3647E6823016}"/>
-              </a:ext>
-            </a:extLst>
-          </p:cNvPr>
-          <p:cNvSpPr>
-            <a:spLocks noGrp="1"/>
-          </p:cNvSpPr>
-          <p:nvPr>
-            <p:ph idx="1"/>
-          </p:nvPr>
-        </p:nvSpPr>
-        <p:spPr/>
-        <p:txBody>
-          <a:bodyPr/>
-          <a:lstStyle/>
-          <a:p>
-            <a:endParaRPr lang="en-US"/>
-          </a:p>
-        </p:txBody>
-      </p:sp>
-    </p:spTree>
-    <p:extLst>
-      <p:ext uri="{BB962C8B-B14F-4D97-AF65-F5344CB8AC3E}">
-        <p14:creationId xmlns:p14="http://schemas.microsoft.com/office/powerpoint/2010/main" val="672436812"/>
-      </p:ext>
-    </p:extLst>
-  </p:cSld>
-  <p:clrMapOvr>
-    <a:masterClrMapping/>
-  </p:clrMapOvr>
-</p:sld>
-</file>
-
-<file path=ppt/slides/slide11.xml><?xml version="1.0" encoding="utf-8"?>
-<p:sld xmlns:a="http://schemas.openxmlformats.org/drawingml/2006/main" xmlns:r="http://schemas.openxmlformats.org/officeDocument/2006/relationships" xmlns:p="http://schemas.openxmlformats.org/presentationml/2006/main">
-  <p:cSld>
-    <p:spTree>
-      <p:nvGrpSpPr>
-        <p:cNvPr id="1" name=""/>
-        <p:cNvGrpSpPr/>
-        <p:nvPr/>
-      </p:nvGrpSpPr>
-      <p:grpSpPr>
-        <a:xfrm>
-          <a:off x="0" y="0"/>
-          <a:ext cx="0" cy="0"/>
-          <a:chOff x="0" y="0"/>
-          <a:chExt cx="0" cy="0"/>
-        </a:xfrm>
-      </p:grpSpPr>
-      <p:sp>
-        <p:nvSpPr>
-          <p:cNvPr id="2" name="Title 1">
-            <a:extLst>
-              <a:ext uri="{FF2B5EF4-FFF2-40B4-BE49-F238E27FC236}">
-                <a16:creationId xmlns:a16="http://schemas.microsoft.com/office/drawing/2014/main" id="{9B4188C5-FF0E-120A-B464-E6A7F3451CD6}"/>
-              </a:ext>
-            </a:extLst>
-          </p:cNvPr>
-          <p:cNvSpPr>
-            <a:spLocks noGrp="1"/>
-          </p:cNvSpPr>
-          <p:nvPr>
-            <p:ph type="title"/>
-          </p:nvPr>
-        </p:nvSpPr>
-        <p:spPr/>
-        <p:txBody>
-          <a:bodyPr/>
-          <a:lstStyle/>
-          <a:p>
-            <a:r>
-              <a:rPr lang="en-IN" dirty="0"/>
-              <a:t>Clusters</a:t>
-            </a:r>
-            <a:endParaRPr lang="en-US" dirty="0"/>
-          </a:p>
-        </p:txBody>
-      </p:sp>
-      <p:sp>
-        <p:nvSpPr>
-          <p:cNvPr id="3" name="Content Placeholder 2">
-            <a:extLst>
-              <a:ext uri="{FF2B5EF4-FFF2-40B4-BE49-F238E27FC236}">
-                <a16:creationId xmlns:a16="http://schemas.microsoft.com/office/drawing/2014/main" id="{161517E2-E46E-E872-4864-67F953EF2454}"/>
-              </a:ext>
-            </a:extLst>
-          </p:cNvPr>
-          <p:cNvSpPr>
-            <a:spLocks noGrp="1"/>
-          </p:cNvSpPr>
-          <p:nvPr>
-            <p:ph idx="1"/>
-          </p:nvPr>
-        </p:nvSpPr>
-        <p:spPr/>
-        <p:txBody>
-          <a:bodyPr/>
-          <a:lstStyle/>
-          <a:p>
-            <a:endParaRPr lang="en-US"/>
-          </a:p>
-        </p:txBody>
-      </p:sp>
-    </p:spTree>
-    <p:extLst>
-      <p:ext uri="{BB962C8B-B14F-4D97-AF65-F5344CB8AC3E}">
-        <p14:creationId xmlns:p14="http://schemas.microsoft.com/office/powerpoint/2010/main" val="2549772978"/>
-      </p:ext>
-    </p:extLst>
-  </p:cSld>
-  <p:clrMapOvr>
-    <a:masterClrMapping/>
-  </p:clrMapOvr>
-</p:sld>
-</file>
-
-<file path=ppt/slides/slide12.xml><?xml version="1.0" encoding="utf-8"?>
-<p:sld xmlns:a="http://schemas.openxmlformats.org/drawingml/2006/main" xmlns:r="http://schemas.openxmlformats.org/officeDocument/2006/relationships" xmlns:p="http://schemas.openxmlformats.org/presentationml/2006/main">
-  <p:cSld>
-    <p:spTree>
-      <p:nvGrpSpPr>
-        <p:cNvPr id="1" name=""/>
-        <p:cNvGrpSpPr/>
-        <p:nvPr/>
-      </p:nvGrpSpPr>
-      <p:grpSpPr>
-        <a:xfrm>
-          <a:off x="0" y="0"/>
-          <a:ext cx="0" cy="0"/>
-          <a:chOff x="0" y="0"/>
-          <a:chExt cx="0" cy="0"/>
-        </a:xfrm>
-      </p:grpSpPr>
-      <p:sp>
-        <p:nvSpPr>
-          <p:cNvPr id="2" name="Title 1">
-            <a:extLst>
-              <a:ext uri="{FF2B5EF4-FFF2-40B4-BE49-F238E27FC236}">
-                <a16:creationId xmlns:a16="http://schemas.microsoft.com/office/drawing/2014/main" id="{CC7CF71D-46CD-892F-2FDA-474660E795AB}"/>
-              </a:ext>
-            </a:extLst>
-          </p:cNvPr>
-          <p:cNvSpPr>
-            <a:spLocks noGrp="1"/>
-          </p:cNvSpPr>
-          <p:nvPr>
-            <p:ph type="title"/>
-          </p:nvPr>
-        </p:nvSpPr>
-        <p:spPr/>
-        <p:txBody>
-          <a:bodyPr/>
-          <a:lstStyle/>
-          <a:p>
-            <a:r>
-              <a:rPr lang="en-IN" dirty="0"/>
-              <a:t>Peer-to-Peer Networks</a:t>
-            </a:r>
-            <a:endParaRPr lang="en-US" dirty="0"/>
-          </a:p>
-        </p:txBody>
-      </p:sp>
-      <p:sp>
-        <p:nvSpPr>
-          <p:cNvPr id="3" name="Content Placeholder 2">
-            <a:extLst>
-              <a:ext uri="{FF2B5EF4-FFF2-40B4-BE49-F238E27FC236}">
-                <a16:creationId xmlns:a16="http://schemas.microsoft.com/office/drawing/2014/main" id="{315242CB-8FC2-C580-2014-C062107A0C16}"/>
-              </a:ext>
-            </a:extLst>
-          </p:cNvPr>
-          <p:cNvSpPr>
-            <a:spLocks noGrp="1"/>
-          </p:cNvSpPr>
-          <p:nvPr>
-            <p:ph idx="1"/>
-          </p:nvPr>
-        </p:nvSpPr>
-        <p:spPr/>
-        <p:txBody>
-          <a:bodyPr/>
-          <a:lstStyle/>
-          <a:p>
-            <a:endParaRPr lang="en-US"/>
-          </a:p>
-        </p:txBody>
-      </p:sp>
-    </p:spTree>
-    <p:extLst>
-      <p:ext uri="{BB962C8B-B14F-4D97-AF65-F5344CB8AC3E}">
-        <p14:creationId xmlns:p14="http://schemas.microsoft.com/office/powerpoint/2010/main" val="2965028336"/>
-      </p:ext>
-    </p:extLst>
-  </p:cSld>
-  <p:clrMapOvr>
-    <a:masterClrMapping/>
-  </p:clrMapOvr>
-</p:sld>
-</file>
-
-<file path=ppt/slides/slide13.xml><?xml version="1.0" encoding="utf-8"?>
-<p:sld xmlns:a="http://schemas.openxmlformats.org/drawingml/2006/main" xmlns:r="http://schemas.openxmlformats.org/officeDocument/2006/relationships" xmlns:p="http://schemas.openxmlformats.org/presentationml/2006/main">
-  <p:cSld>
-    <p:spTree>
-      <p:nvGrpSpPr>
-        <p:cNvPr id="1" name=""/>
-        <p:cNvGrpSpPr/>
-        <p:nvPr/>
-      </p:nvGrpSpPr>
-      <p:grpSpPr>
-        <a:xfrm>
-          <a:off x="0" y="0"/>
-          <a:ext cx="0" cy="0"/>
-          <a:chOff x="0" y="0"/>
-          <a:chExt cx="0" cy="0"/>
-        </a:xfrm>
-      </p:grpSpPr>
-      <p:sp>
-        <p:nvSpPr>
-          <p:cNvPr id="2" name="Title 1">
-            <a:extLst>
-              <a:ext uri="{FF2B5EF4-FFF2-40B4-BE49-F238E27FC236}">
-                <a16:creationId xmlns:a16="http://schemas.microsoft.com/office/drawing/2014/main" id="{B9C29AA4-A025-9F46-CABE-C6A2B2549198}"/>
-              </a:ext>
-            </a:extLst>
-          </p:cNvPr>
-          <p:cNvSpPr>
-            <a:spLocks noGrp="1"/>
-          </p:cNvSpPr>
-          <p:nvPr>
-            <p:ph type="title"/>
-          </p:nvPr>
-        </p:nvSpPr>
-        <p:spPr/>
-        <p:txBody>
-          <a:bodyPr/>
-          <a:lstStyle/>
-          <a:p>
-            <a:r>
-              <a:rPr lang="en-IN" dirty="0"/>
-              <a:t>Grids</a:t>
-            </a:r>
-            <a:endParaRPr lang="en-US" dirty="0"/>
-          </a:p>
-        </p:txBody>
-      </p:sp>
-      <p:sp>
-        <p:nvSpPr>
-          <p:cNvPr id="3" name="Content Placeholder 2">
-            <a:extLst>
-              <a:ext uri="{FF2B5EF4-FFF2-40B4-BE49-F238E27FC236}">
-                <a16:creationId xmlns:a16="http://schemas.microsoft.com/office/drawing/2014/main" id="{35FAAA88-7AE7-F6EF-2A49-EE819A171023}"/>
-              </a:ext>
-            </a:extLst>
-          </p:cNvPr>
-          <p:cNvSpPr>
-            <a:spLocks noGrp="1"/>
-          </p:cNvSpPr>
-          <p:nvPr>
-            <p:ph idx="1"/>
-          </p:nvPr>
-        </p:nvSpPr>
-        <p:spPr/>
-        <p:txBody>
-          <a:bodyPr/>
-          <a:lstStyle/>
-          <a:p>
-            <a:endParaRPr lang="en-US"/>
-          </a:p>
-        </p:txBody>
-      </p:sp>
-    </p:spTree>
-    <p:extLst>
-      <p:ext uri="{BB962C8B-B14F-4D97-AF65-F5344CB8AC3E}">
-        <p14:creationId xmlns:p14="http://schemas.microsoft.com/office/powerpoint/2010/main" val="927419539"/>
       </p:ext>
     </p:extLst>
   </p:cSld>
@@ -19647,186 +19305,6 @@
 </p:sld>
 </file>
 
-<file path=ppt/slides/slide8.xml><?xml version="1.0" encoding="utf-8"?>
-<p:sld xmlns:a="http://schemas.openxmlformats.org/drawingml/2006/main" xmlns:r="http://schemas.openxmlformats.org/officeDocument/2006/relationships" xmlns:p="http://schemas.openxmlformats.org/presentationml/2006/main">
-  <p:cSld>
-    <p:spTree>
-      <p:nvGrpSpPr>
-        <p:cNvPr id="1" name=""/>
-        <p:cNvGrpSpPr/>
-        <p:nvPr/>
-      </p:nvGrpSpPr>
-      <p:grpSpPr>
-        <a:xfrm>
-          <a:off x="0" y="0"/>
-          <a:ext cx="0" cy="0"/>
-          <a:chOff x="0" y="0"/>
-          <a:chExt cx="0" cy="0"/>
-        </a:xfrm>
-      </p:grpSpPr>
-      <p:sp>
-        <p:nvSpPr>
-          <p:cNvPr id="2" name="Title 1">
-            <a:extLst>
-              <a:ext uri="{FF2B5EF4-FFF2-40B4-BE49-F238E27FC236}">
-                <a16:creationId xmlns:a16="http://schemas.microsoft.com/office/drawing/2014/main" id="{1BE5B8CB-6F9E-CEDD-E72B-CA67FA53930B}"/>
-              </a:ext>
-            </a:extLst>
-          </p:cNvPr>
-          <p:cNvSpPr>
-            <a:spLocks noGrp="1"/>
-          </p:cNvSpPr>
-          <p:nvPr>
-            <p:ph type="title"/>
-          </p:nvPr>
-        </p:nvSpPr>
-        <p:spPr/>
-        <p:txBody>
-          <a:bodyPr/>
-          <a:lstStyle/>
-          <a:p>
-            <a:r>
-              <a:rPr lang="en-IN" dirty="0"/>
-              <a:t>IBM Cloud Computing Reference Architecture</a:t>
-            </a:r>
-            <a:endParaRPr lang="en-US" dirty="0"/>
-          </a:p>
-        </p:txBody>
-      </p:sp>
-      <p:sp>
-        <p:nvSpPr>
-          <p:cNvPr id="3" name="Content Placeholder 2">
-            <a:extLst>
-              <a:ext uri="{FF2B5EF4-FFF2-40B4-BE49-F238E27FC236}">
-                <a16:creationId xmlns:a16="http://schemas.microsoft.com/office/drawing/2014/main" id="{847BC086-DDDB-CBDD-7EBD-904745DDAF6D}"/>
-              </a:ext>
-            </a:extLst>
-          </p:cNvPr>
-          <p:cNvSpPr>
-            <a:spLocks noGrp="1"/>
-          </p:cNvSpPr>
-          <p:nvPr>
-            <p:ph idx="1"/>
-          </p:nvPr>
-        </p:nvSpPr>
-        <p:spPr/>
-        <p:txBody>
-          <a:bodyPr/>
-          <a:lstStyle/>
-          <a:p>
-            <a:endParaRPr lang="en-US"/>
-          </a:p>
-        </p:txBody>
-      </p:sp>
-    </p:spTree>
-    <p:extLst>
-      <p:ext uri="{BB962C8B-B14F-4D97-AF65-F5344CB8AC3E}">
-        <p14:creationId xmlns:p14="http://schemas.microsoft.com/office/powerpoint/2010/main" val="3911040508"/>
-      </p:ext>
-    </p:extLst>
-  </p:cSld>
-  <p:clrMapOvr>
-    <a:masterClrMapping/>
-  </p:clrMapOvr>
-</p:sld>
-</file>
-
-<file path=ppt/slides/slide9.xml><?xml version="1.0" encoding="utf-8"?>
-<p:sld xmlns:a="http://schemas.openxmlformats.org/drawingml/2006/main" xmlns:r="http://schemas.openxmlformats.org/officeDocument/2006/relationships" xmlns:p="http://schemas.openxmlformats.org/presentationml/2006/main">
-  <p:cSld>
-    <p:spTree>
-      <p:nvGrpSpPr>
-        <p:cNvPr id="1" name=""/>
-        <p:cNvGrpSpPr/>
-        <p:nvPr/>
-      </p:nvGrpSpPr>
-      <p:grpSpPr>
-        <a:xfrm>
-          <a:off x="0" y="0"/>
-          <a:ext cx="0" cy="0"/>
-          <a:chOff x="0" y="0"/>
-          <a:chExt cx="0" cy="0"/>
-        </a:xfrm>
-      </p:grpSpPr>
-      <p:sp>
-        <p:nvSpPr>
-          <p:cNvPr id="2" name="Title 1">
-            <a:extLst>
-              <a:ext uri="{FF2B5EF4-FFF2-40B4-BE49-F238E27FC236}">
-                <a16:creationId xmlns:a16="http://schemas.microsoft.com/office/drawing/2014/main" id="{978FB4BC-711D-E1B8-1BE7-156C473D3CA2}"/>
-              </a:ext>
-            </a:extLst>
-          </p:cNvPr>
-          <p:cNvSpPr>
-            <a:spLocks noGrp="1"/>
-          </p:cNvSpPr>
-          <p:nvPr>
-            <p:ph type="title"/>
-          </p:nvPr>
-        </p:nvSpPr>
-        <p:spPr/>
-        <p:txBody>
-          <a:bodyPr/>
-          <a:lstStyle/>
-          <a:p>
-            <a:r>
-              <a:rPr lang="en-IN" dirty="0"/>
-              <a:t>Cloud Computing Use Cases</a:t>
-            </a:r>
-            <a:endParaRPr lang="en-US" dirty="0"/>
-          </a:p>
-        </p:txBody>
-      </p:sp>
-      <p:sp>
-        <p:nvSpPr>
-          <p:cNvPr id="3" name="Content Placeholder 2">
-            <a:extLst>
-              <a:ext uri="{FF2B5EF4-FFF2-40B4-BE49-F238E27FC236}">
-                <a16:creationId xmlns:a16="http://schemas.microsoft.com/office/drawing/2014/main" id="{4296128B-19A0-B11D-5227-5CB098991E1F}"/>
-              </a:ext>
-            </a:extLst>
-          </p:cNvPr>
-          <p:cNvSpPr>
-            <a:spLocks noGrp="1"/>
-          </p:cNvSpPr>
-          <p:nvPr>
-            <p:ph idx="1"/>
-          </p:nvPr>
-        </p:nvSpPr>
-        <p:spPr/>
-        <p:txBody>
-          <a:bodyPr/>
-          <a:lstStyle/>
-          <a:p>
-            <a:r>
-              <a:rPr lang="en-IN" dirty="0"/>
-              <a:t>Business Use Cases</a:t>
-            </a:r>
-          </a:p>
-          <a:p>
-            <a:r>
-              <a:rPr lang="en-IN" dirty="0"/>
-              <a:t>Technical Use Cases</a:t>
-            </a:r>
-          </a:p>
-          <a:p>
-            <a:endParaRPr lang="en-US" dirty="0"/>
-          </a:p>
-        </p:txBody>
-      </p:sp>
-    </p:spTree>
-    <p:extLst>
-      <p:ext uri="{BB962C8B-B14F-4D97-AF65-F5344CB8AC3E}">
-        <p14:creationId xmlns:p14="http://schemas.microsoft.com/office/powerpoint/2010/main" val="2588921242"/>
-      </p:ext>
-    </p:extLst>
-  </p:cSld>
-  <p:clrMapOvr>
-    <a:masterClrMapping/>
-  </p:clrMapOvr>
-</p:sld>
-</file>
-
 <file path=ppt/theme/theme1.xml><?xml version="1.0" encoding="utf-8"?>
 <a:theme xmlns:a="http://schemas.openxmlformats.org/drawingml/2006/main" name="Office Theme">
   <a:themeElements>
